--- a/assets/pptx/catalog-163.pptx
+++ b/assets/pptx/catalog-163.pptx
@@ -3981,7 +3981,7 @@
                 <a:ea typeface="Ebrima"/>
                 <a:cs typeface="Ebrima"/>
               </a:rPr>
-              <a:t>የተፍገመገመውን የሚያቀናው (2x)</a:t>
+              <a:t>የተፍገመገመውን የሚያቀናው 2x</a:t>
             </a:r>
           </a:p>
         </p:txBody>
@@ -4501,7 +4501,7 @@
                 <a:ea typeface="Ebrima"/>
                 <a:cs typeface="Ebrima"/>
               </a:rPr>
-              <a:t>የተፍገመገመውን የሚያቀናው (2x)</a:t>
+              <a:t>የተፍገመገመውን የሚያቀናው 2x</a:t>
             </a:r>
           </a:p>
         </p:txBody>
